--- a/인생네컷 프레임/인생네컷 프레임.pptx
+++ b/인생네컷 프레임/인생네컷 프레임.pptx
@@ -244,7 +244,7 @@
           <a:p>
             <a:fld id="{F92ED7C9-DD54-4262-A2E7-1FB1E5652297}" type="datetimeFigureOut">
               <a:rPr lang="ko-KR" altLang="en-US" smtClean="0"/>
-              <a:t>2026-09-07</a:t>
+              <a:t>2026-09-08</a:t>
             </a:fld>
             <a:endParaRPr lang="ko-KR" altLang="en-US"/>
           </a:p>
@@ -414,7 +414,7 @@
           <a:p>
             <a:fld id="{F92ED7C9-DD54-4262-A2E7-1FB1E5652297}" type="datetimeFigureOut">
               <a:rPr lang="ko-KR" altLang="en-US" smtClean="0"/>
-              <a:t>2026-09-07</a:t>
+              <a:t>2026-09-08</a:t>
             </a:fld>
             <a:endParaRPr lang="ko-KR" altLang="en-US"/>
           </a:p>
@@ -594,7 +594,7 @@
           <a:p>
             <a:fld id="{F92ED7C9-DD54-4262-A2E7-1FB1E5652297}" type="datetimeFigureOut">
               <a:rPr lang="ko-KR" altLang="en-US" smtClean="0"/>
-              <a:t>2026-09-07</a:t>
+              <a:t>2026-09-08</a:t>
             </a:fld>
             <a:endParaRPr lang="ko-KR" altLang="en-US"/>
           </a:p>
@@ -764,7 +764,7 @@
           <a:p>
             <a:fld id="{F92ED7C9-DD54-4262-A2E7-1FB1E5652297}" type="datetimeFigureOut">
               <a:rPr lang="ko-KR" altLang="en-US" smtClean="0"/>
-              <a:t>2026-09-07</a:t>
+              <a:t>2026-09-08</a:t>
             </a:fld>
             <a:endParaRPr lang="ko-KR" altLang="en-US"/>
           </a:p>
@@ -1008,7 +1008,7 @@
           <a:p>
             <a:fld id="{F92ED7C9-DD54-4262-A2E7-1FB1E5652297}" type="datetimeFigureOut">
               <a:rPr lang="ko-KR" altLang="en-US" smtClean="0"/>
-              <a:t>2026-09-07</a:t>
+              <a:t>2026-09-08</a:t>
             </a:fld>
             <a:endParaRPr lang="ko-KR" altLang="en-US"/>
           </a:p>
@@ -1240,7 +1240,7 @@
           <a:p>
             <a:fld id="{F92ED7C9-DD54-4262-A2E7-1FB1E5652297}" type="datetimeFigureOut">
               <a:rPr lang="ko-KR" altLang="en-US" smtClean="0"/>
-              <a:t>2026-09-07</a:t>
+              <a:t>2026-09-08</a:t>
             </a:fld>
             <a:endParaRPr lang="ko-KR" altLang="en-US"/>
           </a:p>
@@ -1607,7 +1607,7 @@
           <a:p>
             <a:fld id="{F92ED7C9-DD54-4262-A2E7-1FB1E5652297}" type="datetimeFigureOut">
               <a:rPr lang="ko-KR" altLang="en-US" smtClean="0"/>
-              <a:t>2026-09-07</a:t>
+              <a:t>2026-09-08</a:t>
             </a:fld>
             <a:endParaRPr lang="ko-KR" altLang="en-US"/>
           </a:p>
@@ -1725,7 +1725,7 @@
           <a:p>
             <a:fld id="{F92ED7C9-DD54-4262-A2E7-1FB1E5652297}" type="datetimeFigureOut">
               <a:rPr lang="ko-KR" altLang="en-US" smtClean="0"/>
-              <a:t>2026-09-07</a:t>
+              <a:t>2026-09-08</a:t>
             </a:fld>
             <a:endParaRPr lang="ko-KR" altLang="en-US"/>
           </a:p>
@@ -1820,7 +1820,7 @@
           <a:p>
             <a:fld id="{F92ED7C9-DD54-4262-A2E7-1FB1E5652297}" type="datetimeFigureOut">
               <a:rPr lang="ko-KR" altLang="en-US" smtClean="0"/>
-              <a:t>2026-09-07</a:t>
+              <a:t>2026-09-08</a:t>
             </a:fld>
             <a:endParaRPr lang="ko-KR" altLang="en-US"/>
           </a:p>
@@ -2097,7 +2097,7 @@
           <a:p>
             <a:fld id="{F92ED7C9-DD54-4262-A2E7-1FB1E5652297}" type="datetimeFigureOut">
               <a:rPr lang="ko-KR" altLang="en-US" smtClean="0"/>
-              <a:t>2026-09-07</a:t>
+              <a:t>2026-09-08</a:t>
             </a:fld>
             <a:endParaRPr lang="ko-KR" altLang="en-US"/>
           </a:p>
@@ -2354,7 +2354,7 @@
           <a:p>
             <a:fld id="{F92ED7C9-DD54-4262-A2E7-1FB1E5652297}" type="datetimeFigureOut">
               <a:rPr lang="ko-KR" altLang="en-US" smtClean="0"/>
-              <a:t>2026-09-07</a:t>
+              <a:t>2026-09-08</a:t>
             </a:fld>
             <a:endParaRPr lang="ko-KR" altLang="en-US"/>
           </a:p>
@@ -2567,7 +2567,7 @@
           <a:p>
             <a:fld id="{F92ED7C9-DD54-4262-A2E7-1FB1E5652297}" type="datetimeFigureOut">
               <a:rPr lang="ko-KR" altLang="en-US" smtClean="0"/>
-              <a:t>2026-09-07</a:t>
+              <a:t>2026-09-08</a:t>
             </a:fld>
             <a:endParaRPr lang="ko-KR" altLang="en-US"/>
           </a:p>
@@ -3010,10 +3010,10 @@
       </p:pic>
       <p:pic>
         <p:nvPicPr>
-          <p:cNvPr id="11" name="그림 10">
+          <p:cNvPr id="4" name="그림 3">
             <a:extLst>
               <a:ext uri="{FF2B5EF4-FFF2-40B4-BE49-F238E27FC236}">
-                <a16:creationId xmlns:a16="http://schemas.microsoft.com/office/drawing/2014/main" id="{DC5904F5-A369-45B7-9C05-7D16C7241963}"/>
+                <a16:creationId xmlns:a16="http://schemas.microsoft.com/office/drawing/2014/main" id="{2B56F953-D9BD-45D6-862B-439590B0CB35}"/>
               </a:ext>
             </a:extLst>
           </p:cNvPr>
@@ -3043,14 +3043,149 @@
         </p:blipFill>
         <p:spPr>
           <a:xfrm>
-            <a:off x="796925" y="0"/>
+            <a:off x="3920690" y="0"/>
             <a:ext cx="2286000" cy="6858000"/>
           </a:xfrm>
           <a:prstGeom prst="rect">
             <a:avLst/>
           </a:prstGeom>
+          <a:noFill/>
         </p:spPr>
       </p:pic>
+      <p:grpSp>
+        <p:nvGrpSpPr>
+          <p:cNvPr id="2" name="그룹 1">
+            <a:extLst>
+              <a:ext uri="{FF2B5EF4-FFF2-40B4-BE49-F238E27FC236}">
+                <a16:creationId xmlns:a16="http://schemas.microsoft.com/office/drawing/2014/main" id="{416DB759-92CF-4899-A11C-DFFF8C14217B}"/>
+              </a:ext>
+            </a:extLst>
+          </p:cNvPr>
+          <p:cNvGrpSpPr/>
+          <p:nvPr/>
+        </p:nvGrpSpPr>
+        <p:grpSpPr>
+          <a:xfrm>
+            <a:off x="796925" y="0"/>
+            <a:ext cx="2286000" cy="6858000"/>
+            <a:chOff x="796925" y="0"/>
+            <a:chExt cx="2286000" cy="6858000"/>
+          </a:xfrm>
+        </p:grpSpPr>
+        <p:pic>
+          <p:nvPicPr>
+            <p:cNvPr id="11" name="그림 10">
+              <a:extLst>
+                <a:ext uri="{FF2B5EF4-FFF2-40B4-BE49-F238E27FC236}">
+                  <a16:creationId xmlns:a16="http://schemas.microsoft.com/office/drawing/2014/main" id="{DC5904F5-A369-45B7-9C05-7D16C7241963}"/>
+                </a:ext>
+              </a:extLst>
+            </p:cNvPr>
+            <p:cNvPicPr>
+              <a:picLocks noChangeAspect="1"/>
+            </p:cNvPicPr>
+            <p:nvPr/>
+          </p:nvPicPr>
+          <p:blipFill>
+            <a:blip r:embed="rId3">
+              <a:duotone>
+                <a:schemeClr val="accent4">
+                  <a:shade val="45000"/>
+                  <a:satMod val="135000"/>
+                </a:schemeClr>
+                <a:prstClr val="white"/>
+              </a:duotone>
+              <a:extLst>
+                <a:ext uri="{28A0092B-C50C-407E-A947-70E740481C1C}">
+                  <a14:useLocalDpi xmlns:a14="http://schemas.microsoft.com/office/drawing/2010/main" val="0"/>
+                </a:ext>
+              </a:extLst>
+            </a:blip>
+            <a:stretch>
+              <a:fillRect/>
+            </a:stretch>
+          </p:blipFill>
+          <p:spPr>
+            <a:xfrm>
+              <a:off x="796925" y="0"/>
+              <a:ext cx="2286000" cy="6858000"/>
+            </a:xfrm>
+            <a:prstGeom prst="rect">
+              <a:avLst/>
+            </a:prstGeom>
+          </p:spPr>
+        </p:pic>
+        <p:pic>
+          <p:nvPicPr>
+            <p:cNvPr id="1026" name="Picture 2" descr="투바투 데뷔 5주년 기념 인생네컷 프레임 #투모로우바이투게더 #투바투인생네컷 #투바투프레임 #투바투 #TXT  #TOMORROW_X_TOGETHER #수빈 #SOOBIN #연준 #YEONJUN #범규 #BEOMGYU #태현 #TAEHYUN  #휴닝카이 #HUENINGKAI #모아 #MOA #kpop #kpopidol #idol #idolissue ...">
+              <a:extLst>
+                <a:ext uri="{FF2B5EF4-FFF2-40B4-BE49-F238E27FC236}">
+                  <a16:creationId xmlns:a16="http://schemas.microsoft.com/office/drawing/2014/main" id="{91E20B72-7006-461E-9D9F-8A3B67D32DAF}"/>
+                </a:ext>
+              </a:extLst>
+            </p:cNvPr>
+            <p:cNvPicPr>
+              <a:picLocks noChangeAspect="1" noChangeArrowheads="1"/>
+            </p:cNvPicPr>
+            <p:nvPr/>
+          </p:nvPicPr>
+          <p:blipFill rotWithShape="1">
+            <a:blip r:embed="rId4">
+              <a:extLst>
+                <a:ext uri="{BEBA8EAE-BF5A-486C-A8C5-ECC9F3942E4B}">
+                  <a14:imgProps xmlns:a14="http://schemas.microsoft.com/office/drawing/2010/main">
+                    <a14:imgLayer r:embed="rId5">
+                      <a14:imgEffect>
+                        <a14:backgroundRemoval t="6986" b="89820" l="13283" r="46366">
+                          <a14:foregroundMark x1="34837" y1="29142" x2="36591" y2="40719"/>
+                          <a14:foregroundMark x1="31078" y1="6986" x2="38847" y2="14970"/>
+                          <a14:foregroundMark x1="38847" y1="14970" x2="39850" y2="17166"/>
+                          <a14:foregroundMark x1="33083" y1="72255" x2="42356" y2="81038"/>
+                          <a14:foregroundMark x1="28571" y1="80439" x2="30827" y2="82435"/>
+                          <a14:foregroundMark x1="41855" y1="71457" x2="44361" y2="73852"/>
+                          <a14:foregroundMark x1="41353" y1="71657" x2="43358" y2="73054"/>
+                          <a14:foregroundMark x1="33028" y1="53936" x2="35840" y2="60279"/>
+                          <a14:foregroundMark x1="35840" y1="46906" x2="35840" y2="46906"/>
+                          <a14:foregroundMark x1="37845" y1="46906" x2="42857" y2="48703"/>
+                          <a14:foregroundMark x1="32080" y1="46707" x2="33835" y2="46906"/>
+                          <a14:foregroundMark x1="31078" y1="34930" x2="31078" y2="34930"/>
+                          <a14:foregroundMark x1="27318" y1="78044" x2="27318" y2="78044"/>
+                          <a14:backgroundMark x1="35338" y1="48902" x2="35529" y2="49024"/>
+                          <a14:backgroundMark x1="35280" y1="45261" x2="39195" y2="45672"/>
+                        </a14:backgroundRemoval>
+                      </a14:imgEffect>
+                    </a14:imgLayer>
+                  </a14:imgProps>
+                </a:ext>
+                <a:ext uri="{28A0092B-C50C-407E-A947-70E740481C1C}">
+                  <a14:useLocalDpi xmlns:a14="http://schemas.microsoft.com/office/drawing/2010/main" val="0"/>
+                </a:ext>
+              </a:extLst>
+            </a:blip>
+            <a:srcRect l="19644" r="49332" b="11006"/>
+            <a:stretch/>
+          </p:blipFill>
+          <p:spPr bwMode="auto">
+            <a:xfrm>
+              <a:off x="1260909" y="88329"/>
+              <a:ext cx="1822016" cy="6562728"/>
+            </a:xfrm>
+            <a:prstGeom prst="rect">
+              <a:avLst/>
+            </a:prstGeom>
+            <a:noFill/>
+            <a:extLst>
+              <a:ext uri="{909E8E84-426E-40DD-AFC4-6F175D3DCCD1}">
+                <a14:hiddenFill xmlns:a14="http://schemas.microsoft.com/office/drawing/2010/main">
+                  <a:solidFill>
+                    <a:srgbClr val="FFFFFF"/>
+                  </a:solidFill>
+                </a14:hiddenFill>
+              </a:ext>
+            </a:extLst>
+          </p:spPr>
+        </p:pic>
+      </p:grpSp>
     </p:spTree>
     <p:extLst>
       <p:ext uri="{BB962C8B-B14F-4D97-AF65-F5344CB8AC3E}">
